--- a/Projects/Module17-Observability/Module17 - Observability.pptx
+++ b/Projects/Module17-Observability/Module17 - Observability.pptx
@@ -509,7 +509,7 @@
           <a:p>
             <a:r>
               <a:rPr lang="en-US" dirty="0"/>
-              <a:t>Starting point: Module16b-PlanAndReviewModes/. Fifth Module of Phase 4, shipping as part of the Phase 4 Capstone — Developer CLI (v0.4). Setup adds Microsoft.Extensions.Logging to MiniCode.Agent and Microsoft.Extensions.Logging.Abstractions to MiniCode.Infrastructure, both pinned at 10.0.11 — the exact version already resolving transitively through Microsoft.Extensions.AI.OpenAI. No other package changes.</a:t>
+              <a:t>Starting point: Module16b-PlanAndReviewModes/. Fifth Module of Phase 4, shipping as part of the Phase 4 Capstone — Developer CLI (v0.4). Setup adds Microsoft.Extensions.Logging to MiniCode.Agent and Microsoft.Extensions.Logging.Abstractions to MiniCode.Infrastructure, both pinned at 10.0.12 — the exact version already resolving transitively through Microsoft.Extensions.AI.OpenAI. No other package changes.</a:t>
             </a:r>
             <a:endParaRPr lang="en-US" dirty="0"/>
           </a:p>
@@ -1711,7 +1711,7 @@
                 <a:ea typeface="Courier New" pitchFamily="34" charset="-122"/>
                 <a:cs typeface="Courier New" pitchFamily="34" charset="-120"/>
               </a:rPr>
-              <a:t>Microsoft.Extensions.Logging (Agent) and .Abstractions (Infrastructure), both pinned at 10.0.11 — the version already resolving transitively through Microsoft.Extensions.AI.OpenAI.</a:t>
+              <a:t>Microsoft.Extensions.Logging (Agent) and .Abstractions (Infrastructure), both pinned at 10.0.12 — the version already resolving transitively through Microsoft.Extensions.AI.OpenAI.</a:t>
             </a:r>
             <a:endParaRPr lang="en-US" sz="950" dirty="0"/>
           </a:p>
